--- a/Slides/OpeningBook.pptx
+++ b/Slides/OpeningBook.pptx
@@ -262,7 +262,7 @@
           <a:p>
             <a:fld id="{03A11630-5E4A-49D0-BF1A-16F0C2E577EE}" type="datetimeFigureOut">
               <a:rPr lang="en-US" smtClean="0"/>
-              <a:t>5/10/2026</a:t>
+              <a:t>5/13/2026</a:t>
             </a:fld>
             <a:endParaRPr lang="en-US"/>
           </a:p>
@@ -460,7 +460,7 @@
           <a:p>
             <a:fld id="{03A11630-5E4A-49D0-BF1A-16F0C2E577EE}" type="datetimeFigureOut">
               <a:rPr lang="en-US" smtClean="0"/>
-              <a:t>5/10/2026</a:t>
+              <a:t>5/13/2026</a:t>
             </a:fld>
             <a:endParaRPr lang="en-US"/>
           </a:p>
@@ -668,7 +668,7 @@
           <a:p>
             <a:fld id="{03A11630-5E4A-49D0-BF1A-16F0C2E577EE}" type="datetimeFigureOut">
               <a:rPr lang="en-US" smtClean="0"/>
-              <a:t>5/10/2026</a:t>
+              <a:t>5/13/2026</a:t>
             </a:fld>
             <a:endParaRPr lang="en-US"/>
           </a:p>
@@ -866,7 +866,7 @@
           <a:p>
             <a:fld id="{03A11630-5E4A-49D0-BF1A-16F0C2E577EE}" type="datetimeFigureOut">
               <a:rPr lang="en-US" smtClean="0"/>
-              <a:t>5/10/2026</a:t>
+              <a:t>5/13/2026</a:t>
             </a:fld>
             <a:endParaRPr lang="en-US"/>
           </a:p>
@@ -1141,7 +1141,7 @@
           <a:p>
             <a:fld id="{03A11630-5E4A-49D0-BF1A-16F0C2E577EE}" type="datetimeFigureOut">
               <a:rPr lang="en-US" smtClean="0"/>
-              <a:t>5/10/2026</a:t>
+              <a:t>5/13/2026</a:t>
             </a:fld>
             <a:endParaRPr lang="en-US"/>
           </a:p>
@@ -1406,7 +1406,7 @@
           <a:p>
             <a:fld id="{03A11630-5E4A-49D0-BF1A-16F0C2E577EE}" type="datetimeFigureOut">
               <a:rPr lang="en-US" smtClean="0"/>
-              <a:t>5/10/2026</a:t>
+              <a:t>5/13/2026</a:t>
             </a:fld>
             <a:endParaRPr lang="en-US"/>
           </a:p>
@@ -1818,7 +1818,7 @@
           <a:p>
             <a:fld id="{03A11630-5E4A-49D0-BF1A-16F0C2E577EE}" type="datetimeFigureOut">
               <a:rPr lang="en-US" smtClean="0"/>
-              <a:t>5/10/2026</a:t>
+              <a:t>5/13/2026</a:t>
             </a:fld>
             <a:endParaRPr lang="en-US"/>
           </a:p>
@@ -1959,7 +1959,7 @@
           <a:p>
             <a:fld id="{03A11630-5E4A-49D0-BF1A-16F0C2E577EE}" type="datetimeFigureOut">
               <a:rPr lang="en-US" smtClean="0"/>
-              <a:t>5/10/2026</a:t>
+              <a:t>5/13/2026</a:t>
             </a:fld>
             <a:endParaRPr lang="en-US"/>
           </a:p>
@@ -2072,7 +2072,7 @@
           <a:p>
             <a:fld id="{03A11630-5E4A-49D0-BF1A-16F0C2E577EE}" type="datetimeFigureOut">
               <a:rPr lang="en-US" smtClean="0"/>
-              <a:t>5/10/2026</a:t>
+              <a:t>5/13/2026</a:t>
             </a:fld>
             <a:endParaRPr lang="en-US"/>
           </a:p>
@@ -2383,7 +2383,7 @@
           <a:p>
             <a:fld id="{03A11630-5E4A-49D0-BF1A-16F0C2E577EE}" type="datetimeFigureOut">
               <a:rPr lang="en-US" smtClean="0"/>
-              <a:t>5/10/2026</a:t>
+              <a:t>5/13/2026</a:t>
             </a:fld>
             <a:endParaRPr lang="en-US"/>
           </a:p>
@@ -2671,7 +2671,7 @@
           <a:p>
             <a:fld id="{03A11630-5E4A-49D0-BF1A-16F0C2E577EE}" type="datetimeFigureOut">
               <a:rPr lang="en-US" smtClean="0"/>
-              <a:t>5/10/2026</a:t>
+              <a:t>5/13/2026</a:t>
             </a:fld>
             <a:endParaRPr lang="en-US"/>
           </a:p>
@@ -2912,7 +2912,7 @@
           <a:p>
             <a:fld id="{03A11630-5E4A-49D0-BF1A-16F0C2E577EE}" type="datetimeFigureOut">
               <a:rPr lang="en-US" smtClean="0"/>
-              <a:t>5/10/2026</a:t>
+              <a:t>5/13/2026</a:t>
             </a:fld>
             <a:endParaRPr lang="en-US"/>
           </a:p>
@@ -3398,7 +3398,7 @@
         <p:spPr>
           <a:xfrm>
             <a:off x="618795" y="982176"/>
-            <a:ext cx="9534197" cy="5262979"/>
+            <a:ext cx="10763908" cy="5262979"/>
           </a:xfrm>
           <a:prstGeom prst="rect">
             <a:avLst/>
@@ -3447,7 +3447,7 @@
             <a:pPr algn="l"/>
             <a:r>
               <a:rPr lang="en-US" sz="2400"/>
-              <a:t>Thay vì phải suy nghĩ trong trận đấu, ta sinh ra bộ từ điển khổng lồ với key là thế cờ, value là nước đi rất tốt, được tính toán với độ sâu 20</a:t>
+              <a:t>Thay vì phải suy nghĩ trong trận đấu, ta sinh ra bộ từ điển khổng lồ với key là thế cờ, value là giá trị heuristic của thế cờ, được tính toán với độ sâu 20</a:t>
             </a:r>
           </a:p>
           <a:p>
@@ -3458,7 +3458,7 @@
             <a:pPr algn="l"/>
             <a:r>
               <a:rPr lang="en-US" sz="2400"/>
-              <a:t>Khi agent của mình đến lượt thì sẽ tra từ điển(openingbook) trước, nếu thế cờ có trong từ điển thì trả luôn kết quả</a:t>
+              <a:t>Khi agent của mình đến lượt thì sẽ tra gọi hàm pvs, hàm pvs sẽ tra OpeningBook để xem có tồn tại thế cờ mà pvs cần không, nếu có thì trả về giá trị heuristic luôn. </a:t>
             </a:r>
             <a:br>
               <a:rPr lang="en-US" sz="2400"/>
@@ -3575,7 +3575,7 @@
           <a:p>
             <a:r>
               <a:rPr lang="en-US"/>
-              <a:t>Với mỗi node lấy ra từ BFS queue thì ta gọi hàm search để tính giá trị heuristic với độ sâu 20</a:t>
+              <a:t>Với mỗi node(thế cờ) lấy ra từ BFS queue thì ta gọi hàm search để tính giá trị heuristic với thời gian mỗi thế cờ là 10s</a:t>
             </a:r>
           </a:p>
           <a:p>
@@ -3669,16 +3669,19 @@
         <p:spPr/>
         <p:txBody>
           <a:bodyPr>
-            <a:normAutofit fontScale="92500" lnSpcReduction="20000"/>
+            <a:normAutofit/>
           </a:bodyPr>
           <a:lstStyle/>
           <a:p>
             <a:r>
               <a:rPr lang="en-US"/>
-              <a:t>Ta sẽ loại bỏ(prune) những thế cờ mà giá trị heuristic quá lệch về một bên. </a:t>
-            </a:r>
-          </a:p>
-          <a:p>
+              <a:t>Với những thế cờ mà giá trị heuristic tìm được trong 10s không chênh lệch nhiều với giá trị heuristic tìm được trong 2s thì ta prune</a:t>
+            </a:r>
+          </a:p>
+          <a:p>
+            <a:pPr marL="0" indent="0">
+              <a:buNone/>
+            </a:pPr>
             <a:endParaRPr lang="en-US"/>
           </a:p>
           <a:p>
@@ -3688,49 +3691,12 @@
             </a:r>
           </a:p>
           <a:p>
-            <a:pPr marL="0" indent="0">
-              <a:buNone/>
-            </a:pPr>
-            <a:endParaRPr lang="en-US"/>
-          </a:p>
-          <a:p>
-            <a:r>
-              <a:rPr lang="en-US"/>
-              <a:t>Thời gian nhóm mình sinh ra OpeningBook : 2 tiếng</a:t>
-            </a:r>
-          </a:p>
-          <a:p>
-            <a:pPr marL="0" indent="0">
-              <a:buNone/>
-            </a:pPr>
-            <a:r>
-              <a:rPr lang="en-US"/>
-              <a:t>move = 3, heuristic = 1, </a:t>
-            </a:r>
-            <a:br>
-              <a:rPr lang="en-US"/>
-            </a:br>
-            <a:r>
-              <a:rPr lang="en-US"/>
-              <a:t>move = 0, heuristic = -5, abs(-5) &gt;= prune_threshold = 4</a:t>
-            </a:r>
-          </a:p>
-          <a:p>
-            <a:pPr marL="0" indent="0">
-              <a:buNone/>
-            </a:pPr>
-            <a:r>
-              <a:rPr lang="en-US"/>
-              <a:t>move = 6, heuristic = -5, </a:t>
-            </a:r>
-          </a:p>
-          <a:p>
-            <a:pPr marL="0" indent="0">
-              <a:buNone/>
-            </a:pPr>
-            <a:r>
-              <a:rPr lang="en-US"/>
-              <a:t>move = 4, 5, heuristic = 0,</a:t>
+            <a:endParaRPr lang="en-US"/>
+          </a:p>
+          <a:p>
+            <a:r>
+              <a:rPr lang="en-US"/>
+              <a:t>Kết quả: book có khoảng 10^7 thế cờ với depth = 12</a:t>
             </a:r>
           </a:p>
         </p:txBody>
@@ -3825,7 +3791,7 @@
           <a:p>
             <a:r>
               <a:rPr lang="en-US"/>
-              <a:t>Những nước đi từ 1 cho đến 12 có tỉ lệ rất cao tra trúng bảng OpeningBook</a:t>
+              <a:t>Những nước đi từ 1 cho đến 12 có tỉ lệ rất cao tra trúng bảng OpeningBook. </a:t>
             </a:r>
           </a:p>
           <a:p>
